--- a/slides/Presentation.pptx
+++ b/slides/Presentation.pptx
@@ -937,12 +937,9 @@
         <a:p>
           <a:r>
             <a:rPr lang="en-US" b="1" dirty="0"/>
-            <a:t>Screen: </a:t>
+            <a:t>Stock Selection</a:t>
           </a:r>
-          <a:r>
-            <a:rPr lang="en-US" dirty="0"/>
-            <a:t>Risk, Return, Correlation</a:t>
-          </a:r>
+          <a:endParaRPr lang="en-US" dirty="0"/>
         </a:p>
       </dgm:t>
     </dgm:pt>
@@ -1395,12 +1392,9 @@
           </a:pPr>
           <a:r>
             <a:rPr lang="en-US" sz="1700" b="1" kern="1200" dirty="0"/>
-            <a:t>Screen: </a:t>
+            <a:t>Stock Selection</a:t>
           </a:r>
-          <a:r>
-            <a:rPr lang="en-US" sz="1700" kern="1200" dirty="0"/>
-            <a:t>Risk, Return, Correlation</a:t>
-          </a:r>
+          <a:endParaRPr lang="en-US" sz="1700" kern="1200" dirty="0"/>
         </a:p>
       </dsp:txBody>
       <dsp:txXfrm>
@@ -11638,7 +11632,7 @@
           <p:nvPr>
             <p:extLst>
               <p:ext uri="{D42A27DB-BD31-4B8C-83A1-F6EECF244321}">
-                <p14:modId xmlns:p14="http://schemas.microsoft.com/office/powerpoint/2010/main" val="1806845909"/>
+                <p14:modId xmlns:p14="http://schemas.microsoft.com/office/powerpoint/2010/main" val="3350790189"/>
               </p:ext>
             </p:extLst>
           </p:nvPr>
